--- a/docs/free-rwe-resources/train-the-trainer/training/day-02-vocab-dqd/kit/Participant-Workbook.pptx
+++ b/docs/free-rwe-resources/train-the-trainer/training/day-02-vocab-dqd/kit/Participant-Workbook.pptx
@@ -9,6 +9,7 @@
     <p:sldId id="257" r:id="rId8"/>
     <p:sldId id="258" r:id="rId9"/>
     <p:sldId id="259" r:id="rId10"/>
+    <p:sldId id="260" r:id="rId11"/>
   </p:sldIdLst>
   <p:sldSz cx="12188952" cy="6858000" type="screen4x3"/>
   <p:notesSz cx="6858000" cy="9144000"/>
@@ -3106,7 +3107,7 @@
             <a:avLst/>
           </a:prstGeom>
           <a:solidFill>
-            <a:srgbClr val="4B2682"/>
+            <a:srgbClr val="20425A"/>
           </a:solidFill>
           <a:ln>
             <a:noFill/>
@@ -3149,7 +3150,7 @@
             <a:avLst/>
           </a:prstGeom>
           <a:solidFill>
-            <a:srgbClr val="7B4FA8"/>
+            <a:srgbClr val="904199"/>
           </a:solidFill>
           <a:ln>
             <a:noFill/>
@@ -3192,7 +3193,7 @@
             <a:avLst/>
           </a:prstGeom>
           <a:solidFill>
-            <a:srgbClr val="7B4FA8"/>
+            <a:srgbClr val="904199"/>
           </a:solidFill>
           <a:ln>
             <a:noFill/>
@@ -3235,7 +3236,7 @@
             <a:avLst/>
           </a:prstGeom>
           <a:solidFill>
-            <a:srgbClr val="7B4FA8"/>
+            <a:srgbClr val="904199"/>
           </a:solidFill>
           <a:ln>
             <a:noFill/>
@@ -3291,6 +3292,7 @@
                 <a:solidFill>
                   <a:srgbClr val="FFFFFF"/>
                 </a:solidFill>
+                <a:latin typeface="Gotham Narrow"/>
               </a:rPr>
               <a:t>DAY 2</a:t>
             </a:r>
@@ -3325,6 +3327,7 @@
                 <a:solidFill>
                   <a:srgbClr val="FFFFFF"/>
                 </a:solidFill>
+                <a:latin typeface="Gotham Narrow"/>
               </a:rPr>
               <a:t>Vocabulary &amp; Data Quality</a:t>
             </a:r>
@@ -3357,8 +3360,9 @@
             <a:r>
               <a:rPr sz="2200" b="0" i="0">
                 <a:solidFill>
-                  <a:srgbClr val="C8B4E6"/>
+                  <a:srgbClr val="D9C4E6"/>
                 </a:solidFill>
+                <a:latin typeface="Arial"/>
               </a:rPr>
               <a:t>Participant Workbook</a:t>
             </a:r>
@@ -3391,8 +3395,9 @@
             <a:r>
               <a:rPr sz="1300" b="0" i="0">
                 <a:solidFill>
-                  <a:srgbClr val="AA96CD"/>
+                  <a:srgbClr val="AEC4D2"/>
                 </a:solidFill>
+                <a:latin typeface="Arial"/>
               </a:rPr>
               <a:t>ALS TDI · OHDSI/OMOP Train-the-Trainer</a:t>
             </a:r>
@@ -3432,7 +3437,7 @@
             <a:avLst/>
           </a:prstGeom>
           <a:solidFill>
-            <a:srgbClr val="4B2682"/>
+            <a:srgbClr val="20425A"/>
           </a:solidFill>
           <a:ln>
             <a:noFill/>
@@ -3468,14 +3473,14 @@
         </p:nvSpPr>
         <p:spPr>
           <a:xfrm>
-            <a:off x="0" y="923544"/>
-            <a:ext cx="12188952" cy="36576"/>
+            <a:off x="0" y="905256"/>
+            <a:ext cx="12188952" cy="54864"/>
           </a:xfrm>
           <a:prstGeom prst="rect">
             <a:avLst/>
           </a:prstGeom>
           <a:solidFill>
-            <a:srgbClr val="7B4FA8"/>
+            <a:srgbClr val="904199"/>
           </a:solidFill>
           <a:ln>
             <a:noFill/>
@@ -3531,6 +3536,7 @@
                 <a:solidFill>
                   <a:srgbClr val="FFFFFF"/>
                 </a:solidFill>
+                <a:latin typeface="Gotham Narrow"/>
               </a:rPr>
               <a:t>Learning Objectives</a:t>
             </a:r>
@@ -3565,6 +3571,7 @@
                 <a:solidFill>
                   <a:srgbClr val="5A5A5A"/>
                 </a:solidFill>
+                <a:latin typeface="Arial"/>
               </a:rPr>
               <a:t>By the end of this session, you will be able to:</a:t>
             </a:r>
@@ -3586,7 +3593,7 @@
             <a:avLst/>
           </a:prstGeom>
           <a:solidFill>
-            <a:srgbClr val="7B4FA8"/>
+            <a:srgbClr val="904199"/>
           </a:solidFill>
           <a:ln>
             <a:noFill/>
@@ -3642,6 +3649,7 @@
                 <a:solidFill>
                   <a:srgbClr val="FFFFFF"/>
                 </a:solidFill>
+                <a:latin typeface="Arial"/>
               </a:rPr>
               <a:t>1</a:t>
             </a:r>
@@ -3676,6 +3684,7 @@
                 <a:solidFill>
                   <a:srgbClr val="191919"/>
                 </a:solidFill>
+                <a:latin typeface="Arial"/>
               </a:rPr>
               <a:t>Explain the Kahn framework categories for data quality</a:t>
             </a:r>
@@ -3697,7 +3706,7 @@
             <a:avLst/>
           </a:prstGeom>
           <a:solidFill>
-            <a:srgbClr val="7B4FA8"/>
+            <a:srgbClr val="904199"/>
           </a:solidFill>
           <a:ln>
             <a:noFill/>
@@ -3753,6 +3762,7 @@
                 <a:solidFill>
                   <a:srgbClr val="FFFFFF"/>
                 </a:solidFill>
+                <a:latin typeface="Arial"/>
               </a:rPr>
               <a:t>2</a:t>
             </a:r>
@@ -3787,6 +3797,7 @@
                 <a:solidFill>
                   <a:srgbClr val="191919"/>
                 </a:solidFill>
+                <a:latin typeface="Arial"/>
               </a:rPr>
               <a:t>Describe what DQD checks and how thresholds work</a:t>
             </a:r>
@@ -3808,7 +3819,7 @@
             <a:avLst/>
           </a:prstGeom>
           <a:solidFill>
-            <a:srgbClr val="7B4FA8"/>
+            <a:srgbClr val="904199"/>
           </a:solidFill>
           <a:ln>
             <a:noFill/>
@@ -3864,6 +3875,7 @@
                 <a:solidFill>
                   <a:srgbClr val="FFFFFF"/>
                 </a:solidFill>
+                <a:latin typeface="Arial"/>
               </a:rPr>
               <a:t>3</a:t>
             </a:r>
@@ -3898,6 +3910,7 @@
                 <a:solidFill>
                   <a:srgbClr val="191919"/>
                 </a:solidFill>
+                <a:latin typeface="Arial"/>
               </a:rPr>
               <a:t>Distinguish a true DQ problem from a concept set problem</a:t>
             </a:r>
@@ -3919,7 +3932,7 @@
             <a:avLst/>
           </a:prstGeom>
           <a:solidFill>
-            <a:srgbClr val="7B4FA8"/>
+            <a:srgbClr val="904199"/>
           </a:solidFill>
           <a:ln>
             <a:noFill/>
@@ -3975,6 +3988,7 @@
                 <a:solidFill>
                   <a:srgbClr val="FFFFFF"/>
                 </a:solidFill>
+                <a:latin typeface="Arial"/>
               </a:rPr>
               <a:t>4</a:t>
             </a:r>
@@ -4009,6 +4023,7 @@
                 <a:solidFill>
                   <a:srgbClr val="191919"/>
                 </a:solidFill>
+                <a:latin typeface="Arial"/>
               </a:rPr>
               <a:t>Build a concept set in ATLAS with Include Descendants</a:t>
             </a:r>
@@ -4030,7 +4045,7 @@
             <a:avLst/>
           </a:prstGeom>
           <a:solidFill>
-            <a:srgbClr val="7B4FA8"/>
+            <a:srgbClr val="904199"/>
           </a:solidFill>
           <a:ln>
             <a:noFill/>
@@ -4086,6 +4101,7 @@
                 <a:solidFill>
                   <a:srgbClr val="FFFFFF"/>
                 </a:solidFill>
+                <a:latin typeface="Arial"/>
               </a:rPr>
               <a:t>5</a:t>
             </a:r>
@@ -4120,6 +4136,7 @@
                 <a:solidFill>
                   <a:srgbClr val="191919"/>
                 </a:solidFill>
+                <a:latin typeface="Arial"/>
               </a:rPr>
               <a:t>Validate concept set counts with SQL</a:t>
             </a:r>
@@ -4159,7 +4176,7 @@
             <a:avLst/>
           </a:prstGeom>
           <a:solidFill>
-            <a:srgbClr val="4B2682"/>
+            <a:srgbClr val="20425A"/>
           </a:solidFill>
           <a:ln>
             <a:noFill/>
@@ -4195,14 +4212,14 @@
         </p:nvSpPr>
         <p:spPr>
           <a:xfrm>
-            <a:off x="0" y="923544"/>
-            <a:ext cx="12188952" cy="36576"/>
+            <a:off x="0" y="905256"/>
+            <a:ext cx="12188952" cy="54864"/>
           </a:xfrm>
           <a:prstGeom prst="rect">
             <a:avLst/>
           </a:prstGeom>
           <a:solidFill>
-            <a:srgbClr val="7B4FA8"/>
+            <a:srgbClr val="904199"/>
           </a:solidFill>
           <a:ln>
             <a:noFill/>
@@ -4258,6 +4275,7 @@
                 <a:solidFill>
                   <a:srgbClr val="FFFFFF"/>
                 </a:solidFill>
+                <a:latin typeface="Gotham Narrow"/>
               </a:rPr>
               <a:t>Kahn Framework — Fill In the Definitions</a:t>
             </a:r>
@@ -4298,6 +4316,7 @@
                           <a:solidFill>
                             <a:srgbClr val="FFFFFF"/>
                           </a:solidFill>
+                          <a:latin typeface="Gotham Narrow"/>
                         </a:rPr>
                         <a:t>Category</a:t>
                       </a:r>
@@ -4305,7 +4324,7 @@
                   </a:txBody>
                   <a:tcPr>
                     <a:solidFill>
-                      <a:srgbClr val="4B2682"/>
+                      <a:srgbClr val="20425A"/>
                     </a:solidFill>
                   </a:tcPr>
                 </a:tc>
@@ -4319,6 +4338,7 @@
                           <a:solidFill>
                             <a:srgbClr val="FFFFFF"/>
                           </a:solidFill>
+                          <a:latin typeface="Gotham Narrow"/>
                         </a:rPr>
                         <a:t>Definition (fill in)</a:t>
                       </a:r>
@@ -4326,7 +4346,7 @@
                   </a:txBody>
                   <a:tcPr>
                     <a:solidFill>
-                      <a:srgbClr val="4B2682"/>
+                      <a:srgbClr val="20425A"/>
                     </a:solidFill>
                   </a:tcPr>
                 </a:tc>
@@ -4340,6 +4360,7 @@
                           <a:solidFill>
                             <a:srgbClr val="FFFFFF"/>
                           </a:solidFill>
+                          <a:latin typeface="Gotham Narrow"/>
                         </a:rPr>
                         <a:t>Example</a:t>
                       </a:r>
@@ -4347,7 +4368,7 @@
                   </a:txBody>
                   <a:tcPr>
                     <a:solidFill>
-                      <a:srgbClr val="4B2682"/>
+                      <a:srgbClr val="20425A"/>
                     </a:solidFill>
                   </a:tcPr>
                 </a:tc>
@@ -4363,6 +4384,7 @@
                           <a:solidFill>
                             <a:srgbClr val="191919"/>
                           </a:solidFill>
+                          <a:latin typeface="Arial"/>
                         </a:rPr>
                         <a:t>Conformance</a:t>
                       </a:r>
@@ -4384,6 +4406,7 @@
                           <a:solidFill>
                             <a:srgbClr val="191919"/>
                           </a:solidFill>
+                          <a:latin typeface="Arial"/>
                         </a:rPr>
                         <a:t/>
                       </a:r>
@@ -4405,6 +4428,7 @@
                           <a:solidFill>
                             <a:srgbClr val="191919"/>
                           </a:solidFill>
+                          <a:latin typeface="Arial"/>
                         </a:rPr>
                         <a:t>Every drug_concept_id must exist in the concept table</a:t>
                       </a:r>
@@ -4428,6 +4452,7 @@
                           <a:solidFill>
                             <a:srgbClr val="191919"/>
                           </a:solidFill>
+                          <a:latin typeface="Arial"/>
                         </a:rPr>
                         <a:t>Completeness</a:t>
                       </a:r>
@@ -4449,6 +4474,7 @@
                           <a:solidFill>
                             <a:srgbClr val="191919"/>
                           </a:solidFill>
+                          <a:latin typeface="Arial"/>
                         </a:rPr>
                         <a:t/>
                       </a:r>
@@ -4470,6 +4496,7 @@
                           <a:solidFill>
                             <a:srgbClr val="191919"/>
                           </a:solidFill>
+                          <a:latin typeface="Arial"/>
                         </a:rPr>
                         <a:t>Fraction of condition rows with concept_id = 0</a:t>
                       </a:r>
@@ -4493,6 +4520,7 @@
                           <a:solidFill>
                             <a:srgbClr val="191919"/>
                           </a:solidFill>
+                          <a:latin typeface="Arial"/>
                         </a:rPr>
                         <a:t>Plausibility</a:t>
                       </a:r>
@@ -4514,6 +4542,7 @@
                           <a:solidFill>
                             <a:srgbClr val="191919"/>
                           </a:solidFill>
+                          <a:latin typeface="Arial"/>
                         </a:rPr>
                         <a:t/>
                       </a:r>
@@ -4535,6 +4564,7 @@
                           <a:solidFill>
                             <a:srgbClr val="191919"/>
                           </a:solidFill>
+                          <a:latin typeface="Arial"/>
                         </a:rPr>
                         <a:t>No birth year in the future</a:t>
                       </a:r>
@@ -4584,7 +4614,7 @@
             <a:avLst/>
           </a:prstGeom>
           <a:solidFill>
-            <a:srgbClr val="4B2682"/>
+            <a:srgbClr val="20425A"/>
           </a:solidFill>
           <a:ln>
             <a:noFill/>
@@ -4620,14 +4650,14 @@
         </p:nvSpPr>
         <p:spPr>
           <a:xfrm>
-            <a:off x="0" y="923544"/>
-            <a:ext cx="12188952" cy="36576"/>
+            <a:off x="0" y="905256"/>
+            <a:ext cx="12188952" cy="54864"/>
           </a:xfrm>
           <a:prstGeom prst="rect">
             <a:avLst/>
           </a:prstGeom>
           <a:solidFill>
-            <a:srgbClr val="7B4FA8"/>
+            <a:srgbClr val="904199"/>
           </a:solidFill>
           <a:ln>
             <a:noFill/>
@@ -4683,6 +4713,7 @@
                 <a:solidFill>
                   <a:srgbClr val="FFFFFF"/>
                 </a:solidFill>
+                <a:latin typeface="Gotham Narrow"/>
               </a:rPr>
               <a:t>Concept Set Lab — Record Your Findings</a:t>
             </a:r>
@@ -4721,6 +4752,7 @@
                 <a:solidFill>
                   <a:srgbClr val="191919"/>
                 </a:solidFill>
+                <a:latin typeface="Arial"/>
               </a:rPr>
               <a:t>Concept set name I built:  ________________________________________</a:t>
             </a:r>
@@ -4736,6 +4768,7 @@
                 <a:solidFill>
                   <a:srgbClr val="191919"/>
                 </a:solidFill>
+                <a:latin typeface="Arial"/>
               </a:rPr>
               <a:t>Number of standard concepts included:  ___________________________</a:t>
             </a:r>
@@ -4751,6 +4784,7 @@
                 <a:solidFill>
                   <a:srgbClr val="191919"/>
                 </a:solidFill>
+                <a:latin typeface="Arial"/>
               </a:rPr>
               <a:t>Include Descendants toggled ON?  ☐ Yes  ☐ No</a:t>
             </a:r>
@@ -4766,6 +4800,7 @@
                 <a:solidFill>
                   <a:srgbClr val="191919"/>
                 </a:solidFill>
+                <a:latin typeface="Arial"/>
               </a:rPr>
               <a:t>Number of concepts in Included Concepts tab (with descendants):  ___</a:t>
             </a:r>
@@ -4781,6 +4816,7 @@
                 <a:solidFill>
                   <a:srgbClr val="191919"/>
                 </a:solidFill>
+                <a:latin typeface="Arial"/>
               </a:rPr>
               <a:t>Number of source codes in the Mapped tab:  _______________________</a:t>
             </a:r>
@@ -4796,6 +4832,7 @@
                 <a:solidFill>
                   <a:srgbClr val="191919"/>
                 </a:solidFill>
+                <a:latin typeface="Arial"/>
               </a:rPr>
               <a:t>Did all Included Concepts show Standard = 'S'?  ☐ Yes  ☐ No</a:t>
             </a:r>
@@ -4811,6 +4848,7 @@
                 <a:solidFill>
                   <a:srgbClr val="191919"/>
                 </a:solidFill>
+                <a:latin typeface="Arial"/>
               </a:rPr>
               <a:t>SQL count (total exposures):  ____________________________________</a:t>
             </a:r>
@@ -4826,6 +4864,7 @@
                 <a:solidFill>
                   <a:srgbClr val="191919"/>
                 </a:solidFill>
+                <a:latin typeface="Arial"/>
               </a:rPr>
               <a:t>Atlas count:  ____________________________________________________</a:t>
             </a:r>
@@ -4841,8 +4880,296 @@
                 <a:solidFill>
                   <a:srgbClr val="191919"/>
                 </a:solidFill>
+                <a:latin typeface="Arial"/>
               </a:rPr>
               <a:t>Did they match?  ☐ Yes  ☐ No — if not, why?  ____________________</a:t>
+            </a:r>
+          </a:p>
+        </p:txBody>
+      </p:sp>
+    </p:spTree>
+  </p:cSld>
+  <p:clrMapOvr>
+    <a:masterClrMapping/>
+  </p:clrMapOvr>
+</p:sld>
+</file>
+
+<file path=ppt/slides/slide5.xml><?xml version="1.0" encoding="utf-8"?>
+<p:sld xmlns:a="http://schemas.openxmlformats.org/drawingml/2006/main" xmlns:p="http://schemas.openxmlformats.org/presentationml/2006/main" xmlns:r="http://schemas.openxmlformats.org/officeDocument/2006/relationships">
+  <p:cSld>
+    <p:spTree>
+      <p:nvGrpSpPr>
+        <p:cNvPr id="1" name=""/>
+        <p:cNvGrpSpPr/>
+        <p:nvPr/>
+      </p:nvGrpSpPr>
+      <p:grpSpPr/>
+      <p:sp>
+        <p:nvSpPr>
+          <p:cNvPr id="2" name="Rectangle 1"/>
+          <p:cNvSpPr/>
+          <p:nvPr/>
+        </p:nvSpPr>
+        <p:spPr>
+          <a:xfrm>
+            <a:off x="0" y="0"/>
+            <a:ext cx="12188952" cy="6858000"/>
+          </a:xfrm>
+          <a:prstGeom prst="rect">
+            <a:avLst/>
+          </a:prstGeom>
+          <a:solidFill>
+            <a:srgbClr val="20425A"/>
+          </a:solidFill>
+          <a:ln>
+            <a:noFill/>
+          </a:ln>
+        </p:spPr>
+        <p:style>
+          <a:lnRef idx="1">
+            <a:schemeClr val="accent1"/>
+          </a:lnRef>
+          <a:fillRef idx="3">
+            <a:schemeClr val="accent1"/>
+          </a:fillRef>
+          <a:effectRef idx="2">
+            <a:schemeClr val="accent1"/>
+          </a:effectRef>
+          <a:fontRef idx="minor">
+            <a:schemeClr val="lt1"/>
+          </a:fontRef>
+        </p:style>
+        <p:txBody>
+          <a:bodyPr rtlCol="0" anchor="ctr"/>
+          <a:lstStyle/>
+          <a:p>
+            <a:pPr algn="ctr"/>
+          </a:p>
+        </p:txBody>
+      </p:sp>
+      <p:sp>
+        <p:nvSpPr>
+          <p:cNvPr id="3" name="Rectangle 2"/>
+          <p:cNvSpPr/>
+          <p:nvPr/>
+        </p:nvSpPr>
+        <p:spPr>
+          <a:xfrm>
+            <a:off x="0" y="0"/>
+            <a:ext cx="12188952" cy="64008"/>
+          </a:xfrm>
+          <a:prstGeom prst="rect">
+            <a:avLst/>
+          </a:prstGeom>
+          <a:solidFill>
+            <a:srgbClr val="904199"/>
+          </a:solidFill>
+          <a:ln>
+            <a:noFill/>
+          </a:ln>
+        </p:spPr>
+        <p:style>
+          <a:lnRef idx="1">
+            <a:schemeClr val="accent1"/>
+          </a:lnRef>
+          <a:fillRef idx="3">
+            <a:schemeClr val="accent1"/>
+          </a:fillRef>
+          <a:effectRef idx="2">
+            <a:schemeClr val="accent1"/>
+          </a:effectRef>
+          <a:fontRef idx="minor">
+            <a:schemeClr val="lt1"/>
+          </a:fontRef>
+        </p:style>
+        <p:txBody>
+          <a:bodyPr rtlCol="0" anchor="ctr"/>
+          <a:lstStyle/>
+          <a:p>
+            <a:pPr algn="ctr"/>
+          </a:p>
+        </p:txBody>
+      </p:sp>
+      <p:sp>
+        <p:nvSpPr>
+          <p:cNvPr id="4" name="Rectangle 3"/>
+          <p:cNvSpPr/>
+          <p:nvPr/>
+        </p:nvSpPr>
+        <p:spPr>
+          <a:xfrm>
+            <a:off x="0" y="6793992"/>
+            <a:ext cx="12188952" cy="64008"/>
+          </a:xfrm>
+          <a:prstGeom prst="rect">
+            <a:avLst/>
+          </a:prstGeom>
+          <a:solidFill>
+            <a:srgbClr val="904199"/>
+          </a:solidFill>
+          <a:ln>
+            <a:noFill/>
+          </a:ln>
+        </p:spPr>
+        <p:style>
+          <a:lnRef idx="1">
+            <a:schemeClr val="accent1"/>
+          </a:lnRef>
+          <a:fillRef idx="3">
+            <a:schemeClr val="accent1"/>
+          </a:fillRef>
+          <a:effectRef idx="2">
+            <a:schemeClr val="accent1"/>
+          </a:effectRef>
+          <a:fontRef idx="minor">
+            <a:schemeClr val="lt1"/>
+          </a:fontRef>
+        </p:style>
+        <p:txBody>
+          <a:bodyPr rtlCol="0" anchor="ctr"/>
+          <a:lstStyle/>
+          <a:p>
+            <a:pPr algn="ctr"/>
+          </a:p>
+        </p:txBody>
+      </p:sp>
+      <p:sp>
+        <p:nvSpPr>
+          <p:cNvPr id="5" name="TextBox 4"/>
+          <p:cNvSpPr txBox="1"/>
+          <p:nvPr/>
+        </p:nvSpPr>
+        <p:spPr>
+          <a:xfrm>
+            <a:off x="475488" y="1828800"/>
+            <a:ext cx="11237976" cy="1188720"/>
+          </a:xfrm>
+          <a:prstGeom prst="rect">
+            <a:avLst/>
+          </a:prstGeom>
+          <a:noFill/>
+        </p:spPr>
+        <p:txBody>
+          <a:bodyPr wrap="square">
+            <a:spAutoFit/>
+          </a:bodyPr>
+          <a:lstStyle/>
+          <a:p>
+            <a:pPr algn="l"/>
+            <a:r>
+              <a:rPr sz="4400" b="1" i="0">
+                <a:solidFill>
+                  <a:srgbClr val="FFFFFF"/>
+                </a:solidFill>
+                <a:latin typeface="Gotham Narrow"/>
+              </a:rPr>
+              <a:t>Thank You.  Questions?</a:t>
+            </a:r>
+          </a:p>
+        </p:txBody>
+      </p:sp>
+      <p:sp>
+        <p:nvSpPr>
+          <p:cNvPr id="6" name="TextBox 5"/>
+          <p:cNvSpPr txBox="1"/>
+          <p:nvPr/>
+        </p:nvSpPr>
+        <p:spPr>
+          <a:xfrm>
+            <a:off x="475488" y="3383280"/>
+            <a:ext cx="11237976" cy="640080"/>
+          </a:xfrm>
+          <a:prstGeom prst="rect">
+            <a:avLst/>
+          </a:prstGeom>
+          <a:noFill/>
+        </p:spPr>
+        <p:txBody>
+          <a:bodyPr wrap="square">
+            <a:spAutoFit/>
+          </a:bodyPr>
+          <a:lstStyle/>
+          <a:p>
+            <a:pPr algn="l"/>
+            <a:r>
+              <a:rPr sz="2400" b="0" i="0">
+                <a:solidFill>
+                  <a:srgbClr val="FFFFFF"/>
+                </a:solidFill>
+                <a:latin typeface="Arial"/>
+              </a:rPr>
+              <a:t>Danielle Boyce</a:t>
+            </a:r>
+          </a:p>
+        </p:txBody>
+      </p:sp>
+      <p:sp>
+        <p:nvSpPr>
+          <p:cNvPr id="7" name="TextBox 6"/>
+          <p:cNvSpPr txBox="1"/>
+          <p:nvPr/>
+        </p:nvSpPr>
+        <p:spPr>
+          <a:xfrm>
+            <a:off x="475488" y="3977639"/>
+            <a:ext cx="11237976" cy="640080"/>
+          </a:xfrm>
+          <a:prstGeom prst="rect">
+            <a:avLst/>
+          </a:prstGeom>
+          <a:noFill/>
+        </p:spPr>
+        <p:txBody>
+          <a:bodyPr wrap="square">
+            <a:spAutoFit/>
+          </a:bodyPr>
+          <a:lstStyle/>
+          <a:p>
+            <a:pPr algn="l"/>
+            <a:r>
+              <a:rPr sz="2200" b="0" i="0">
+                <a:solidFill>
+                  <a:srgbClr val="D9C4E6"/>
+                </a:solidFill>
+                <a:latin typeface="Arial"/>
+              </a:rPr>
+              <a:t>dboyce@als.net</a:t>
+            </a:r>
+          </a:p>
+        </p:txBody>
+      </p:sp>
+      <p:sp>
+        <p:nvSpPr>
+          <p:cNvPr id="8" name="TextBox 7"/>
+          <p:cNvSpPr txBox="1"/>
+          <p:nvPr/>
+        </p:nvSpPr>
+        <p:spPr>
+          <a:xfrm>
+            <a:off x="475488" y="6309360"/>
+            <a:ext cx="8229600" cy="365760"/>
+          </a:xfrm>
+          <a:prstGeom prst="rect">
+            <a:avLst/>
+          </a:prstGeom>
+          <a:noFill/>
+        </p:spPr>
+        <p:txBody>
+          <a:bodyPr wrap="square">
+            <a:spAutoFit/>
+          </a:bodyPr>
+          <a:lstStyle/>
+          <a:p>
+            <a:pPr algn="l"/>
+            <a:r>
+              <a:rPr sz="1300" b="0" i="0">
+                <a:solidFill>
+                  <a:srgbClr val="AEC4D2"/>
+                </a:solidFill>
+                <a:latin typeface="Arial"/>
+              </a:rPr>
+              <a:t>ALS TDI · OHDSI/OMOP Train-the-Trainer</a:t>
             </a:r>
           </a:p>
         </p:txBody>

--- a/docs/free-rwe-resources/train-the-trainer/training/day-02-vocab-dqd/kit/Participant-Workbook.pptx
+++ b/docs/free-rwe-resources/train-the-trainer/training/day-02-vocab-dqd/kit/Participant-Workbook.pptx
@@ -4581,6 +4581,305 @@
           </a:graphicData>
         </a:graphic>
       </p:graphicFrame>
+      <p:sp>
+        <p:nvSpPr>
+          <p:cNvPr id="6" name="TextBox 5"/>
+          <p:cNvSpPr txBox="1"/>
+          <p:nvPr/>
+        </p:nvSpPr>
+        <p:spPr>
+          <a:xfrm>
+            <a:off x="475488" y="3703320"/>
+            <a:ext cx="11247120" cy="320040"/>
+          </a:xfrm>
+          <a:prstGeom prst="rect">
+            <a:avLst/>
+          </a:prstGeom>
+          <a:noFill/>
+        </p:spPr>
+        <p:txBody>
+          <a:bodyPr wrap="none">
+            <a:spAutoFit/>
+          </a:bodyPr>
+          <a:lstStyle/>
+          <a:p>
+            <a:r>
+              <a:rPr sz="1400" b="1">
+                <a:solidFill>
+                  <a:srgbClr val="20425A"/>
+                </a:solidFill>
+                <a:latin typeface="Arial"/>
+              </a:rPr>
+              <a:t>Two assessment contexts — fill in the definitions:</a:t>
+            </a:r>
+          </a:p>
+        </p:txBody>
+      </p:sp>
+      <p:graphicFrame>
+        <p:nvGraphicFramePr>
+          <p:cNvPr id="7" name="Table 6"/>
+          <p:cNvGraphicFramePr>
+            <a:graphicFrameLocks noGrp="1"/>
+          </p:cNvGraphicFramePr>
+          <p:nvPr/>
+        </p:nvGraphicFramePr>
+        <p:xfrm>
+          <a:off x="475488" y="4069080"/>
+          <a:ext cx="11247120" cy="1371600"/>
+        </p:xfrm>
+        <a:graphic>
+          <a:graphicData uri="http://schemas.openxmlformats.org/drawingml/2006/table">
+            <a:tbl>
+              <a:tblPr firstRow="1" bandRow="1">
+                <a:tableStyleId>{5C22544A-7EE6-4342-B048-85BDC9FD1C3A}</a:tableStyleId>
+              </a:tblPr>
+              <a:tblGrid>
+                <a:gridCol w="2103120"/>
+                <a:gridCol w="6035040"/>
+                <a:gridCol w="3108960"/>
+              </a:tblGrid>
+              <a:tr h="457200">
+                <a:tc>
+                  <a:txBody>
+                    <a:bodyPr/>
+                    <a:lstStyle/>
+                    <a:p>
+                      <a:r>
+                        <a:rPr sz="1300" b="1">
+                          <a:solidFill>
+                            <a:srgbClr val="FFFFFF"/>
+                          </a:solidFill>
+                          <a:latin typeface="Arial"/>
+                        </a:rPr>
+                        <a:t>Context</a:t>
+                      </a:r>
+                    </a:p>
+                  </a:txBody>
+                  <a:tcPr anchor="ctr">
+                    <a:solidFill>
+                      <a:srgbClr val="20425A"/>
+                    </a:solidFill>
+                  </a:tcPr>
+                </a:tc>
+                <a:tc>
+                  <a:txBody>
+                    <a:bodyPr/>
+                    <a:lstStyle/>
+                    <a:p>
+                      <a:r>
+                        <a:rPr sz="1300" b="1">
+                          <a:solidFill>
+                            <a:srgbClr val="FFFFFF"/>
+                          </a:solidFill>
+                          <a:latin typeface="Arial"/>
+                        </a:rPr>
+                        <a:t>Definition (fill in)</a:t>
+                      </a:r>
+                    </a:p>
+                  </a:txBody>
+                  <a:tcPr anchor="ctr">
+                    <a:solidFill>
+                      <a:srgbClr val="20425A"/>
+                    </a:solidFill>
+                  </a:tcPr>
+                </a:tc>
+                <a:tc>
+                  <a:txBody>
+                    <a:bodyPr/>
+                    <a:lstStyle/>
+                    <a:p>
+                      <a:r>
+                        <a:rPr sz="1300" b="1">
+                          <a:solidFill>
+                            <a:srgbClr val="FFFFFF"/>
+                          </a:solidFill>
+                          <a:latin typeface="Arial"/>
+                        </a:rPr>
+                        <a:t>Example</a:t>
+                      </a:r>
+                    </a:p>
+                  </a:txBody>
+                  <a:tcPr anchor="ctr">
+                    <a:solidFill>
+                      <a:srgbClr val="20425A"/>
+                    </a:solidFill>
+                  </a:tcPr>
+                </a:tc>
+              </a:tr>
+              <a:tr h="457200">
+                <a:tc>
+                  <a:txBody>
+                    <a:bodyPr/>
+                    <a:lstStyle/>
+                    <a:p>
+                      <a:r>
+                        <a:rPr sz="1250" b="1">
+                          <a:solidFill>
+                            <a:srgbClr val="2B2B2B"/>
+                          </a:solidFill>
+                          <a:latin typeface="Arial"/>
+                        </a:rPr>
+                        <a:t>Verification</a:t>
+                      </a:r>
+                    </a:p>
+                  </a:txBody>
+                  <a:tcPr anchor="ctr">
+                    <a:solidFill>
+                      <a:srgbClr val="EEF2F5"/>
+                    </a:solidFill>
+                  </a:tcPr>
+                </a:tc>
+                <a:tc>
+                  <a:txBody>
+                    <a:bodyPr/>
+                    <a:lstStyle/>
+                    <a:p>
+                      <a:r>
+                        <a:rPr sz="1250" b="0">
+                          <a:solidFill>
+                            <a:srgbClr val="2B2B2B"/>
+                          </a:solidFill>
+                          <a:latin typeface="Arial"/>
+                        </a:rPr>
+                        <a:t/>
+                      </a:r>
+                    </a:p>
+                  </a:txBody>
+                  <a:tcPr anchor="ctr">
+                    <a:solidFill>
+                      <a:srgbClr val="EEF2F5"/>
+                    </a:solidFill>
+                  </a:tcPr>
+                </a:tc>
+                <a:tc>
+                  <a:txBody>
+                    <a:bodyPr/>
+                    <a:lstStyle/>
+                    <a:p>
+                      <a:r>
+                        <a:rPr sz="1250" b="0">
+                          <a:solidFill>
+                            <a:srgbClr val="2B2B2B"/>
+                          </a:solidFill>
+                          <a:latin typeface="Arial"/>
+                        </a:rPr>
+                        <a:t>No birth dates in the future</a:t>
+                      </a:r>
+                    </a:p>
+                  </a:txBody>
+                  <a:tcPr anchor="ctr">
+                    <a:solidFill>
+                      <a:srgbClr val="EEF2F5"/>
+                    </a:solidFill>
+                  </a:tcPr>
+                </a:tc>
+              </a:tr>
+              <a:tr h="457200">
+                <a:tc>
+                  <a:txBody>
+                    <a:bodyPr/>
+                    <a:lstStyle/>
+                    <a:p>
+                      <a:r>
+                        <a:rPr sz="1250" b="1">
+                          <a:solidFill>
+                            <a:srgbClr val="2B2B2B"/>
+                          </a:solidFill>
+                          <a:latin typeface="Arial"/>
+                        </a:rPr>
+                        <a:t>Validation</a:t>
+                      </a:r>
+                    </a:p>
+                  </a:txBody>
+                  <a:tcPr anchor="ctr">
+                    <a:solidFill>
+                      <a:srgbClr val="FFFFFF"/>
+                    </a:solidFill>
+                  </a:tcPr>
+                </a:tc>
+                <a:tc>
+                  <a:txBody>
+                    <a:bodyPr/>
+                    <a:lstStyle/>
+                    <a:p>
+                      <a:r>
+                        <a:rPr sz="1250" b="0">
+                          <a:solidFill>
+                            <a:srgbClr val="2B2B2B"/>
+                          </a:solidFill>
+                          <a:latin typeface="Arial"/>
+                        </a:rPr>
+                        <a:t/>
+                      </a:r>
+                    </a:p>
+                  </a:txBody>
+                  <a:tcPr anchor="ctr">
+                    <a:solidFill>
+                      <a:srgbClr val="FFFFFF"/>
+                    </a:solidFill>
+                  </a:tcPr>
+                </a:tc>
+                <a:tc>
+                  <a:txBody>
+                    <a:bodyPr/>
+                    <a:lstStyle/>
+                    <a:p>
+                      <a:r>
+                        <a:rPr sz="1250" b="0">
+                          <a:solidFill>
+                            <a:srgbClr val="2B2B2B"/>
+                          </a:solidFill>
+                          <a:latin typeface="Arial"/>
+                        </a:rPr>
+                        <a:t>Diabetes prevalence matches published national rates</a:t>
+                      </a:r>
+                    </a:p>
+                  </a:txBody>
+                  <a:tcPr anchor="ctr">
+                    <a:solidFill>
+                      <a:srgbClr val="FFFFFF"/>
+                    </a:solidFill>
+                  </a:tcPr>
+                </a:tc>
+              </a:tr>
+            </a:tbl>
+          </a:graphicData>
+        </a:graphic>
+      </p:graphicFrame>
+      <p:sp>
+        <p:nvSpPr>
+          <p:cNvPr id="8" name="TextBox 7"/>
+          <p:cNvSpPr txBox="1"/>
+          <p:nvPr/>
+        </p:nvSpPr>
+        <p:spPr>
+          <a:xfrm>
+            <a:off x="475488" y="5623560"/>
+            <a:ext cx="11247120" cy="822960"/>
+          </a:xfrm>
+          <a:prstGeom prst="rect">
+            <a:avLst/>
+          </a:prstGeom>
+          <a:noFill/>
+        </p:spPr>
+        <p:txBody>
+          <a:bodyPr wrap="square">
+            <a:spAutoFit/>
+          </a:bodyPr>
+          <a:lstStyle/>
+          <a:p>
+            <a:r>
+              <a:rPr sz="1250" i="1">
+                <a:solidFill>
+                  <a:srgbClr val="20425A"/>
+                </a:solidFill>
+                <a:latin typeface="Arial"/>
+              </a:rPr>
+              <a:t>Bonus: conformance has three subtypes (value · relational · computational) and plausibility has three (uniqueness · atemporal · temporal). Write one example check for each subtype you can.</a:t>
+            </a:r>
+          </a:p>
+        </p:txBody>
+      </p:sp>
     </p:spTree>
   </p:cSld>
   <p:clrMapOvr>
